--- a/Portafolio_Inversion_Magna_2026_MAGNA.pptx
+++ b/Portafolio_Inversion_Magna_2026_MAGNA.pptx
@@ -16412,8 +16412,8 @@
         </p:blipFill>
         <p:spPr>
           <a:xfrm>
-            <a:off x="2144268" y="3034894"/>
-            <a:ext cx="1005840" cy="1005840"/>
+            <a:off x="566928" y="2542032"/>
+            <a:ext cx="4160520" cy="2240280"/>
           </a:xfrm>
           <a:prstGeom prst="rect">
             <a:avLst/>
@@ -16492,7 +16492,7 @@
                 <a:ea typeface="Calibri" pitchFamily="34" charset="-122"/>
                 <a:cs typeface="Calibri" pitchFamily="34" charset="-120"/>
               </a:rPr>
-              <a:t>Imagen referencial · render por incorporar</a:t>
+              <a:t/>
             </a:r>
             <a:endParaRPr lang="en-US" sz="850" dirty="0"/>
           </a:p>

--- a/Portafolio_Inversion_Magna_2026_MAGNA.pptx
+++ b/Portafolio_Inversion_Magna_2026_MAGNA.pptx
@@ -18525,8 +18525,8 @@
         </p:blipFill>
         <p:spPr>
           <a:xfrm>
-            <a:off x="2144268" y="3034894"/>
-            <a:ext cx="1005840" cy="1005840"/>
+            <a:off x="566928" y="2542032"/>
+            <a:ext cx="4160520" cy="2240280"/>
           </a:xfrm>
           <a:prstGeom prst="rect">
             <a:avLst/>
@@ -18605,7 +18605,7 @@
                 <a:ea typeface="Calibri" pitchFamily="34" charset="-122"/>
                 <a:cs typeface="Calibri" pitchFamily="34" charset="-120"/>
               </a:rPr>
-              <a:t>Imagen referencial · render por incorporar</a:t>
+              <a:t/>
             </a:r>
             <a:endParaRPr lang="en-US" sz="850" dirty="0"/>
           </a:p>

--- a/Portafolio_Inversion_Magna_2026_MAGNA.pptx
+++ b/Portafolio_Inversion_Magna_2026_MAGNA.pptx
@@ -2966,8 +2966,8 @@
         </p:blipFill>
         <p:spPr>
           <a:xfrm>
-            <a:off x="1938528" y="3202229"/>
-            <a:ext cx="1005840" cy="1005840"/>
+            <a:off x="566928" y="2377440"/>
+            <a:ext cx="3749039" cy="3749039"/>
           </a:xfrm>
           <a:prstGeom prst="rect">
             <a:avLst/>
@@ -3046,7 +3046,7 @@
                 <a:ea typeface="Calibri" pitchFamily="34" charset="-122"/>
                 <a:cs typeface="Calibri" pitchFamily="34" charset="-120"/>
               </a:rPr>
-              <a:t>Imagen referencial · render por incorporar</a:t>
+              <a:t/>
             </a:r>
             <a:endParaRPr lang="en-US" sz="850" dirty="0"/>
           </a:p>
